--- a/slides/week07/ch08_demand.pptx
+++ b/slides/week07/ch08_demand.pptx
@@ -26,6 +26,7 @@
     <p:sldId id="274" r:id="rId25"/>
     <p:sldId id="275" r:id="rId26"/>
     <p:sldId id="276" r:id="rId27"/>
+    <p:sldId id="277" r:id="rId28"/>
   </p:sldIdLst>
   <p:notesMasterIdLst>
     <p:notesMasterId r:id="rId15"/>
@@ -591,7 +592,7 @@
           <a:lstStyle/>
           <a:p>
             <a:r>
-              <a:t>8.2절의 실제 통행량 그래프와 생성된 수요의 모양이 같은지 나란히 확인한다. 같지 않으면 프로파일 적용이 잘못된 것이다.</a:t>
+              <a:t>대체로 맞지만 항상은 아니다. 고속도로 구간은 도로가 길지만 거기서 택시를 부르지 않는다. 가정을 명시하고 넘어가는 것이 이 과목의 방식이다.</a:t>
             </a:r>
           </a:p>
         </p:txBody>
@@ -661,7 +662,7 @@
           <a:lstStyle/>
           <a:p>
             <a:r>
-              <a:t>형식이 틀린 수요가 서버에 올라가 이상한 결과를 내는 것보다 올리기 전에 막히는 편이 낫다. 서버가 없으면 이 절은 건너뛴다.</a:t>
+              <a:t>8.2절의 실제 통행량 그래프와 생성된 수요의 모양이 같은지 나란히 확인한다. 같지 않으면 프로파일 적용이 잘못된 것이다.</a:t>
             </a:r>
           </a:p>
         </p:txBody>
@@ -731,7 +732,7 @@
           <a:lstStyle/>
           <a:p>
             <a:r>
-              <a:t>도로 위 샘플링의 가정을 다시 언급하고 넘어간다. 오후에는 12장으로 이동해 결과를 읽는 방법을 다룬다.</a:t>
+              <a:t>형식이 틀린 수요가 서버에 올라가 이상한 결과를 내는 것보다 올리기 전에 막히는 편이 낫다. 서버가 없으면 이 절은 건너뛴다.</a:t>
             </a:r>
           </a:p>
         </p:txBody>
@@ -801,6 +802,76 @@
           <a:lstStyle/>
           <a:p>
             <a:r>
+              <a:t>도로 위 샘플링의 가정을 다시 언급하고 넘어간다. 오후에는 12장으로 이동해 결과를 읽는 방법을 다룬다.</a:t>
+            </a:r>
+          </a:p>
+        </p:txBody>
+      </p:sp>
+      <p:sp>
+        <p:nvSpPr>
+          <p:cNvPr id="4" name="Slide Number Placeholder 3"/>
+          <p:cNvSpPr>
+            <a:spLocks noGrp="1"/>
+          </p:cNvSpPr>
+          <p:nvPr>
+            <p:ph type="sldNum" idx="5" sz="quarter"/>
+          </p:nvPr>
+        </p:nvSpPr>
+        <p:spPr/>
+      </p:sp>
+    </p:spTree>
+  </p:cSld>
+  <p:clrMapOvr>
+    <a:masterClrMapping/>
+  </p:clrMapOvr>
+</p:notes>
+</file>
+
+<file path=ppt/notesSlides/notesSlide14.xml><?xml version="1.0" encoding="utf-8"?>
+<p:notes xmlns:a="http://schemas.openxmlformats.org/drawingml/2006/main" xmlns:p="http://schemas.openxmlformats.org/presentationml/2006/main" xmlns:r="http://schemas.openxmlformats.org/officeDocument/2006/relationships">
+  <p:cSld>
+    <p:spTree>
+      <p:nvGrpSpPr>
+        <p:cNvPr id="1" name=""/>
+        <p:cNvGrpSpPr/>
+        <p:nvPr/>
+      </p:nvGrpSpPr>
+      <p:grpSpPr>
+        <a:xfrm>
+          <a:off x="0" y="0"/>
+          <a:ext cx="0" cy="0"/>
+          <a:chOff x="0" y="0"/>
+          <a:chExt cx="0" cy="0"/>
+        </a:xfrm>
+      </p:grpSpPr>
+      <p:sp>
+        <p:nvSpPr>
+          <p:cNvPr id="2" name="Slide Image Placeholder 1"/>
+          <p:cNvSpPr>
+            <a:spLocks noGrp="1"/>
+          </p:cNvSpPr>
+          <p:nvPr>
+            <p:ph type="sldImg" idx="2"/>
+          </p:nvPr>
+        </p:nvSpPr>
+        <p:spPr/>
+      </p:sp>
+      <p:sp>
+        <p:nvSpPr>
+          <p:cNvPr id="3" name="Notes Placeholder 2"/>
+          <p:cNvSpPr>
+            <a:spLocks noGrp="1"/>
+          </p:cNvSpPr>
+          <p:nvPr>
+            <p:ph type="body" idx="3" sz="quarter"/>
+          </p:nvPr>
+        </p:nvSpPr>
+        <p:spPr/>
+        <p:txBody>
+          <a:bodyPr/>
+          <a:lstStyle/>
+          <a:p>
+            <a:r>
               <a:t>연습 8.3은 가정을 전부 명시하고 가정 하나를 바꿨을 때 결과 범위를 제시하는 과제다. 기말 프로젝트 보고서에서 요구하는 형식과 같다.</a:t>
             </a:r>
           </a:p>
@@ -1011,7 +1082,7 @@
           <a:lstStyle/>
           <a:p>
             <a:r>
-              <a:t>개인 기록이 아니라 집계값이라는 점이 중요하다. 8시 12분에 미사동에서 출발했다는 정보는 없고, 8시대에 미사동에서 신장동으로 47.3명이 갔다는 정보만 있다.</a:t>
+              <a:t>슬라이드는 개요만 다룬다. 세부 내용과 코드는 교재 원고와 실습 노트북에서 확인한다. 교재 저장소는 비공개이므로 초대받은 계정으로 로그인한 상태여야 주소가 열린다.</a:t>
             </a:r>
           </a:p>
         </p:txBody>
@@ -1081,7 +1152,7 @@
           <a:lstStyle/>
           <a:p>
             <a:r>
-              <a:t>통행이 많으면서 하루를 전부 실행하지 않아도 되는 구간이라 그 시간대를 골랐다.</a:t>
+              <a:t>개인 기록이 아니라 집계값이라는 점이 중요하다. 8시 12분에 미사동에서 출발했다는 정보는 없고, 8시대에 미사동에서 신장동으로 47.3명이 갔다는 정보만 있다.</a:t>
             </a:r>
           </a:p>
         </p:txBody>
@@ -1151,7 +1222,7 @@
           <a:lstStyle/>
           <a:p>
             <a:r>
-              <a:t>행정동 코드 앞 다섯 자리가 시군구다. 이 54%라는 숫자가 시뮬레이션 대상 범위를 정하는 근거가 된다. 기말 프로젝트에서 무당이는 캠퍼스 안에서 끝나므로 사정이 다르다.</a:t>
+              <a:t>통행이 많으면서 하루를 전부 실행하지 않아도 되는 구간이라 그 시간대를 골랐다.</a:t>
             </a:r>
           </a:p>
         </p:txBody>
@@ -1221,7 +1292,7 @@
           <a:lstStyle/>
           <a:p>
             <a:r>
-              <a:t>단위를 틀리면 오류 없이 이상한 결과가 나온다. 그래서 형식 검증을 계약처럼 강제한다. 기말 프로젝트 제출물도 이 검증을 먼저 통과해야 한다.</a:t>
+              <a:t>행정동 코드 앞 다섯 자리가 시군구다. 이 54%라는 숫자가 시뮬레이션 대상 범위를 정하는 근거가 된다. 기말 프로젝트에서 무당이는 캠퍼스 안에서 끝나므로 사정이 다르다.</a:t>
             </a:r>
           </a:p>
         </p:txBody>
@@ -1291,7 +1362,7 @@
           <a:lstStyle/>
           <a:p>
             <a:r>
-              <a:t>산 중턱에서 택시를 부르는 사람은 없다. 지도를 보여주면 학생들이 먼저 문제를 발견한다.</a:t>
+              <a:t>단위를 틀리면 오류 없이 이상한 결과가 나온다. 그래서 형식 검증을 계약처럼 강제한다. 기말 프로젝트 제출물도 이 검증을 먼저 통과해야 한다.</a:t>
             </a:r>
           </a:p>
         </p:txBody>
@@ -1361,7 +1432,7 @@
           <a:lstStyle/>
           <a:p>
             <a:r>
-              <a:t>대체로 맞지만 항상은 아니다. 고속도로 구간은 도로가 길지만 거기서 택시를 부르지 않는다. 가정을 명시하고 넘어가는 것이 이 과목의 방식이다.</a:t>
+              <a:t>산 중턱에서 택시를 부르는 사람은 없다. 지도를 보여주면 학생들이 먼저 문제를 발견한다.</a:t>
             </a:r>
           </a:p>
         </p:txBody>
@@ -4996,12 +5067,12 @@
       <p:grpSpPr/>
       <p:sp>
         <p:nvSpPr>
-          <p:cNvPr id="2" name="Text Placeholder 1"/>
-          <p:cNvSpPr>
-            <a:spLocks noGrp="1"/>
-          </p:cNvSpPr>
-          <p:nvPr>
-            <p:ph type="body" idx="100"/>
+          <p:cNvPr id="2" name="Title 1"/>
+          <p:cNvSpPr>
+            <a:spLocks noGrp="1"/>
+          </p:cNvSpPr>
+          <p:nvPr>
+            <p:ph type="title" idx="100"/>
           </p:nvPr>
         </p:nvSpPr>
         <p:spPr/>
@@ -5010,19 +5081,19 @@
           <a:lstStyle/>
           <a:p>
             <a:r>
-              <a:t>03</a:t>
-            </a:r>
-          </a:p>
-        </p:txBody>
-      </p:sp>
-      <p:sp>
-        <p:nvSpPr>
-          <p:cNvPr id="3" name="Title 2"/>
-          <p:cNvSpPr>
-            <a:spLocks noGrp="1"/>
-          </p:cNvSpPr>
-          <p:nvPr>
-            <p:ph type="title" idx="101"/>
+              <a:t>2.3 공간 패턴</a:t>
+            </a:r>
+          </a:p>
+        </p:txBody>
+      </p:sp>
+      <p:sp>
+        <p:nvSpPr>
+          <p:cNvPr id="3" name="Text Placeholder 2"/>
+          <p:cNvSpPr>
+            <a:spLocks noGrp="1"/>
+          </p:cNvSpPr>
+          <p:nvPr>
+            <p:ph type="body" idx="101"/>
           </p:nvPr>
         </p:nvSpPr>
         <p:spPr/>
@@ -5031,7 +5102,7 @@
           <a:lstStyle/>
           <a:p>
             <a:r>
-              <a:t>교재 8.4 시뮬레이터 수요 형식</a:t>
+              <a:t>2. 교재 8.1–8.3 O-D 데이터와 패턴</a:t>
             </a:r>
           </a:p>
         </p:txBody>
@@ -5051,22 +5122,88 @@
           <a:bodyPr/>
           <a:lstStyle/>
           <a:p>
-            <a:pPr>
-              <a:spcAft>
-                <a:spcPts val="1000"/>
-              </a:spcAft>
-            </a:pPr>
-            <a:r>
-              <a:rPr>
+            <a:pPr/>
+            <a:r>
+              <a:t>하남 출발 통행의 54%가 하남 안에서 종료</a:t>
+            </a:r>
+          </a:p>
+          <a:p>
+            <a:pPr/>
+            <a:r>
+              <a:t>나머지 절반의 목적지: 서울 동남권(강동·송파·강남)과 인접 시군</a:t>
+            </a:r>
+          </a:p>
+          <a:p>
+            <a:pPr/>
+            <a:r>
+              <a:t>경계 설정의 영향</a:t>
+            </a:r>
+          </a:p>
+          <a:p>
+            <a:pPr lvl="1"/>
+            <a:r>
+              <a:t>하남 경계 안만 다루면 통행의 절반 누락</a:t>
+            </a:r>
+          </a:p>
+          <a:p>
+            <a:pPr lvl="1"/>
+            <a:r>
+              <a:t>수도권 전체를 다루면 데이터와 계산량이 크게 증가</a:t>
+            </a:r>
+          </a:p>
+          <a:p>
+            <a:pPr/>
+            <a:r>
+              <a:t>결정 기준: 답하려는 질문</a:t>
+            </a:r>
+          </a:p>
+        </p:txBody>
+      </p:sp>
+      <p:sp>
+        <p:nvSpPr>
+          <p:cNvPr id="25" name="Slide Number Placeholder 0"/>
+          <p:cNvSpPr>
+            <a:spLocks noGrp="1"/>
+          </p:cNvSpPr>
+          <p:nvPr>
+            <p:ph type="sldNum" sz="quarter" idx="4294967295"/>
+          </p:nvPr>
+        </p:nvSpPr>
+        <p:spPr>
+          <a:xfrm>
+            <a:off x="10591495" y="6355080"/>
+            <a:ext cx="914400" cy="274320"/>
+          </a:xfrm>
+          <a:prstGeom prst="rect">
+            <a:avLst/>
+          </a:prstGeom>
+          <a:extLst>
+            <a:ext uri="{C572A759-6A51-4108-AA02-DFA0A04FC94B}">
+              <ma14:wrappingTextBoxFlag xmlns:ma14="http://schemas.microsoft.com/office/mac/drawingml/2011/main" val="0"/>
+            </a:ext>
+          </a:extLst>
+        </p:spPr>
+        <p:txBody>
+          <a:bodyPr/>
+          <a:lstStyle>
+            <a:lvl1pPr>
+              <a:defRPr sz="1000">
                 <a:solidFill>
                   <a:srgbClr val="AFAFAF"/>
                 </a:solidFill>
-              </a:rPr>
-              <a:t>3.1  </a:t>
-            </a:r>
-            <a:r>
-              <a:t>다섯 개 컬럼과 검증</a:t>
-            </a:r>
+                <a:latin typeface="Pretendard Medium"/>
+                <a:ea typeface="Pretendard Medium"/>
+                <a:cs typeface="Pretendard Medium"/>
+              </a:defRPr>
+            </a:lvl1pPr>
+          </a:lstStyle>
+          <a:p>
+            <a:pPr algn="r"/>
+            <a:fld id="{F7021451-1387-4CA6-816F-3879F97B5CBC}" type="slidenum">
+              <a:rPr b="0" lang="en-US"/>
+              <a:t>1004</a:t>
+            </a:fld>
+            <a:endParaRPr lang="en-US"/>
           </a:p>
         </p:txBody>
       </p:sp>
@@ -5090,12 +5227,12 @@
       <p:grpSpPr/>
       <p:sp>
         <p:nvSpPr>
-          <p:cNvPr id="2" name="Title 1"/>
-          <p:cNvSpPr>
-            <a:spLocks noGrp="1"/>
-          </p:cNvSpPr>
-          <p:nvPr>
-            <p:ph type="title" idx="100"/>
+          <p:cNvPr id="2" name="Text Placeholder 1"/>
+          <p:cNvSpPr>
+            <a:spLocks noGrp="1"/>
+          </p:cNvSpPr>
+          <p:nvPr>
+            <p:ph type="body" idx="100"/>
           </p:nvPr>
         </p:nvSpPr>
         <p:spPr/>
@@ -5104,19 +5241,19 @@
           <a:lstStyle/>
           <a:p>
             <a:r>
-              <a:t>3.1 다섯 개 컬럼과 검증</a:t>
-            </a:r>
-          </a:p>
-        </p:txBody>
-      </p:sp>
-      <p:sp>
-        <p:nvSpPr>
-          <p:cNvPr id="3" name="Text Placeholder 2"/>
-          <p:cNvSpPr>
-            <a:spLocks noGrp="1"/>
-          </p:cNvSpPr>
-          <p:nvPr>
-            <p:ph type="body" idx="101"/>
+              <a:t>03</a:t>
+            </a:r>
+          </a:p>
+        </p:txBody>
+      </p:sp>
+      <p:sp>
+        <p:nvSpPr>
+          <p:cNvPr id="3" name="Title 2"/>
+          <p:cNvSpPr>
+            <a:spLocks noGrp="1"/>
+          </p:cNvSpPr>
+          <p:nvPr>
+            <p:ph type="title" idx="101"/>
           </p:nvPr>
         </p:nvSpPr>
         <p:spPr/>
@@ -5125,7 +5262,7 @@
           <a:lstStyle/>
           <a:p>
             <a:r>
-              <a:t>3. 교재 8.4 시뮬레이터 수요 형식</a:t>
+              <a:t>교재 8.4 시뮬레이터 수요 형식</a:t>
             </a:r>
           </a:p>
         </p:txBody>
@@ -5145,88 +5282,22 @@
           <a:bodyPr/>
           <a:lstStyle/>
           <a:p>
-            <a:pPr/>
-            <a:r>
-              <a:t>시뮬레이터는 집계표가 아니라 개인 목록을 입력받음</a:t>
-            </a:r>
-          </a:p>
-          <a:p>
-            <a:pPr/>
-            <a:r>
-              <a:t>컬럼 다섯 개: request_time과 출발·도착 위경도 네 개</a:t>
-            </a:r>
-          </a:p>
-          <a:p>
-            <a:pPr/>
-            <a:r>
-              <a:t>request_time은 자정부터의 분 — 1080이 18:00</a:t>
-            </a:r>
-          </a:p>
-          <a:p>
-            <a:pPr/>
-            <a:r>
-              <a:t>검증 함수가 잡아 주는 실수</a:t>
-            </a:r>
-          </a:p>
-          <a:p>
-            <a:pPr lvl="1"/>
-            <a:r>
-              <a:t>분 단위를 초 단위로 입력한 경우</a:t>
-            </a:r>
-          </a:p>
-          <a:p>
-            <a:pPr lvl="1"/>
-            <a:r>
-              <a:t>위도와 경도를 서로 바꿔 입력한 경우</a:t>
-            </a:r>
-          </a:p>
-        </p:txBody>
-      </p:sp>
-      <p:sp>
-        <p:nvSpPr>
-          <p:cNvPr id="25" name="Slide Number Placeholder 0"/>
-          <p:cNvSpPr>
-            <a:spLocks noGrp="1"/>
-          </p:cNvSpPr>
-          <p:nvPr>
-            <p:ph type="sldNum" sz="quarter" idx="4294967295"/>
-          </p:nvPr>
-        </p:nvSpPr>
-        <p:spPr>
-          <a:xfrm>
-            <a:off x="10591495" y="6355080"/>
-            <a:ext cx="914400" cy="274320"/>
-          </a:xfrm>
-          <a:prstGeom prst="rect">
-            <a:avLst/>
-          </a:prstGeom>
-          <a:extLst>
-            <a:ext uri="{C572A759-6A51-4108-AA02-DFA0A04FC94B}">
-              <ma14:wrappingTextBoxFlag xmlns:ma14="http://schemas.microsoft.com/office/mac/drawingml/2011/main" val="0"/>
-            </a:ext>
-          </a:extLst>
-        </p:spPr>
-        <p:txBody>
-          <a:bodyPr/>
-          <a:lstStyle>
-            <a:lvl1pPr>
-              <a:defRPr sz="1000">
+            <a:pPr>
+              <a:spcAft>
+                <a:spcPts val="1000"/>
+              </a:spcAft>
+            </a:pPr>
+            <a:r>
+              <a:rPr>
                 <a:solidFill>
                   <a:srgbClr val="AFAFAF"/>
                 </a:solidFill>
-                <a:latin typeface="Pretendard Medium"/>
-                <a:ea typeface="Pretendard Medium"/>
-                <a:cs typeface="Pretendard Medium"/>
-              </a:defRPr>
-            </a:lvl1pPr>
-          </a:lstStyle>
-          <a:p>
-            <a:pPr algn="r"/>
-            <a:fld id="{F7021451-1387-4CA6-816F-3879F97B5CBC}" type="slidenum">
-              <a:rPr b="0" lang="en-US"/>
-              <a:t>1004</a:t>
-            </a:fld>
-            <a:endParaRPr lang="en-US"/>
+              </a:rPr>
+              <a:t>3.1  </a:t>
+            </a:r>
+            <a:r>
+              <a:t>다섯 개 컬럼과 검증</a:t>
+            </a:r>
           </a:p>
         </p:txBody>
       </p:sp>
@@ -5250,12 +5321,12 @@
       <p:grpSpPr/>
       <p:sp>
         <p:nvSpPr>
-          <p:cNvPr id="2" name="Text Placeholder 1"/>
-          <p:cNvSpPr>
-            <a:spLocks noGrp="1"/>
-          </p:cNvSpPr>
-          <p:nvPr>
-            <p:ph type="body" idx="100"/>
+          <p:cNvPr id="2" name="Title 1"/>
+          <p:cNvSpPr>
+            <a:spLocks noGrp="1"/>
+          </p:cNvSpPr>
+          <p:nvPr>
+            <p:ph type="title" idx="100"/>
           </p:nvPr>
         </p:nvSpPr>
         <p:spPr/>
@@ -5264,19 +5335,19 @@
           <a:lstStyle/>
           <a:p>
             <a:r>
-              <a:t>04</a:t>
-            </a:r>
-          </a:p>
-        </p:txBody>
-      </p:sp>
-      <p:sp>
-        <p:nvSpPr>
-          <p:cNvPr id="3" name="Title 2"/>
-          <p:cNvSpPr>
-            <a:spLocks noGrp="1"/>
-          </p:cNvSpPr>
-          <p:nvPr>
-            <p:ph type="title" idx="101"/>
+              <a:t>3.1 다섯 개 컬럼과 검증</a:t>
+            </a:r>
+          </a:p>
+        </p:txBody>
+      </p:sp>
+      <p:sp>
+        <p:nvSpPr>
+          <p:cNvPr id="3" name="Text Placeholder 2"/>
+          <p:cNvSpPr>
+            <a:spLocks noGrp="1"/>
+          </p:cNvSpPr>
+          <p:nvPr>
+            <p:ph type="body" idx="101"/>
           </p:nvPr>
         </p:nvSpPr>
         <p:spPr/>
@@ -5285,7 +5356,7 @@
           <a:lstStyle/>
           <a:p>
             <a:r>
-              <a:t>교재 8.5–8.7 수요 생성 세 단계</a:t>
+              <a:t>3. 교재 8.4 시뮬레이터 수요 형식</a:t>
             </a:r>
           </a:p>
         </p:txBody>
@@ -5305,58 +5376,88 @@
           <a:bodyPr/>
           <a:lstStyle/>
           <a:p>
-            <a:pPr>
-              <a:spcAft>
-                <a:spcPts val="1000"/>
-              </a:spcAft>
-            </a:pPr>
-            <a:r>
-              <a:rPr>
+            <a:pPr/>
+            <a:r>
+              <a:t>시뮬레이터는 집계표가 아니라 개인 목록을 입력받음</a:t>
+            </a:r>
+          </a:p>
+          <a:p>
+            <a:pPr/>
+            <a:r>
+              <a:t>컬럼 다섯 개: request_time과 출발·도착 위경도 네 개</a:t>
+            </a:r>
+          </a:p>
+          <a:p>
+            <a:pPr/>
+            <a:r>
+              <a:t>request_time은 자정부터의 분 — 1080이 18:00</a:t>
+            </a:r>
+          </a:p>
+          <a:p>
+            <a:pPr/>
+            <a:r>
+              <a:t>검증 함수가 잡아 주는 실수</a:t>
+            </a:r>
+          </a:p>
+          <a:p>
+            <a:pPr lvl="1"/>
+            <a:r>
+              <a:t>분 단위를 초 단위로 입력한 경우</a:t>
+            </a:r>
+          </a:p>
+          <a:p>
+            <a:pPr lvl="1"/>
+            <a:r>
+              <a:t>위도와 경도를 서로 바꿔 입력한 경우</a:t>
+            </a:r>
+          </a:p>
+        </p:txBody>
+      </p:sp>
+      <p:sp>
+        <p:nvSpPr>
+          <p:cNvPr id="25" name="Slide Number Placeholder 0"/>
+          <p:cNvSpPr>
+            <a:spLocks noGrp="1"/>
+          </p:cNvSpPr>
+          <p:nvPr>
+            <p:ph type="sldNum" sz="quarter" idx="4294967295"/>
+          </p:nvPr>
+        </p:nvSpPr>
+        <p:spPr>
+          <a:xfrm>
+            <a:off x="10591495" y="6355080"/>
+            <a:ext cx="914400" cy="274320"/>
+          </a:xfrm>
+          <a:prstGeom prst="rect">
+            <a:avLst/>
+          </a:prstGeom>
+          <a:extLst>
+            <a:ext uri="{C572A759-6A51-4108-AA02-DFA0A04FC94B}">
+              <ma14:wrappingTextBoxFlag xmlns:ma14="http://schemas.microsoft.com/office/mac/drawingml/2011/main" val="0"/>
+            </a:ext>
+          </a:extLst>
+        </p:spPr>
+        <p:txBody>
+          <a:bodyPr/>
+          <a:lstStyle>
+            <a:lvl1pPr>
+              <a:defRPr sz="1000">
                 <a:solidFill>
                   <a:srgbClr val="AFAFAF"/>
                 </a:solidFill>
-              </a:rPr>
-              <a:t>4.1  </a:t>
-            </a:r>
-            <a:r>
-              <a:t>1단계 경계 안 균등 샘플링</a:t>
-            </a:r>
-          </a:p>
-          <a:p>
-            <a:pPr>
-              <a:spcAft>
-                <a:spcPts val="1000"/>
-              </a:spcAft>
-            </a:pPr>
-            <a:r>
-              <a:rPr>
-                <a:solidFill>
-                  <a:srgbClr val="AFAFAF"/>
-                </a:solidFill>
-              </a:rPr>
-              <a:t>4.2  </a:t>
-            </a:r>
-            <a:r>
-              <a:t>2단계 도로 위 샘플링</a:t>
-            </a:r>
-          </a:p>
-          <a:p>
-            <a:pPr>
-              <a:spcAft>
-                <a:spcPts val="1000"/>
-              </a:spcAft>
-            </a:pPr>
-            <a:r>
-              <a:rPr>
-                <a:solidFill>
-                  <a:srgbClr val="AFAFAF"/>
-                </a:solidFill>
-              </a:rPr>
-              <a:t>4.3  </a:t>
-            </a:r>
-            <a:r>
-              <a:t>3단계 시간대 프로파일 반영</a:t>
-            </a:r>
+                <a:latin typeface="Pretendard Medium"/>
+                <a:ea typeface="Pretendard Medium"/>
+                <a:cs typeface="Pretendard Medium"/>
+              </a:defRPr>
+            </a:lvl1pPr>
+          </a:lstStyle>
+          <a:p>
+            <a:pPr algn="r"/>
+            <a:fld id="{F7021451-1387-4CA6-816F-3879F97B5CBC}" type="slidenum">
+              <a:rPr b="0" lang="en-US"/>
+              <a:t>1004</a:t>
+            </a:fld>
+            <a:endParaRPr lang="en-US"/>
           </a:p>
         </p:txBody>
       </p:sp>
@@ -5380,6 +5481,136 @@
       <p:grpSpPr/>
       <p:sp>
         <p:nvSpPr>
+          <p:cNvPr id="2" name="Text Placeholder 1"/>
+          <p:cNvSpPr>
+            <a:spLocks noGrp="1"/>
+          </p:cNvSpPr>
+          <p:nvPr>
+            <p:ph type="body" idx="100"/>
+          </p:nvPr>
+        </p:nvSpPr>
+        <p:spPr/>
+        <p:txBody>
+          <a:bodyPr/>
+          <a:lstStyle/>
+          <a:p>
+            <a:r>
+              <a:t>04</a:t>
+            </a:r>
+          </a:p>
+        </p:txBody>
+      </p:sp>
+      <p:sp>
+        <p:nvSpPr>
+          <p:cNvPr id="3" name="Title 2"/>
+          <p:cNvSpPr>
+            <a:spLocks noGrp="1"/>
+          </p:cNvSpPr>
+          <p:nvPr>
+            <p:ph type="title" idx="101"/>
+          </p:nvPr>
+        </p:nvSpPr>
+        <p:spPr/>
+        <p:txBody>
+          <a:bodyPr/>
+          <a:lstStyle/>
+          <a:p>
+            <a:r>
+              <a:t>교재 8.5–8.7 수요 생성 세 단계</a:t>
+            </a:r>
+          </a:p>
+        </p:txBody>
+      </p:sp>
+      <p:sp>
+        <p:nvSpPr>
+          <p:cNvPr id="4" name="Text Placeholder 3"/>
+          <p:cNvSpPr>
+            <a:spLocks noGrp="1"/>
+          </p:cNvSpPr>
+          <p:nvPr>
+            <p:ph type="body" idx="102"/>
+          </p:nvPr>
+        </p:nvSpPr>
+        <p:spPr/>
+        <p:txBody>
+          <a:bodyPr/>
+          <a:lstStyle/>
+          <a:p>
+            <a:pPr>
+              <a:spcAft>
+                <a:spcPts val="1000"/>
+              </a:spcAft>
+            </a:pPr>
+            <a:r>
+              <a:rPr>
+                <a:solidFill>
+                  <a:srgbClr val="AFAFAF"/>
+                </a:solidFill>
+              </a:rPr>
+              <a:t>4.1  </a:t>
+            </a:r>
+            <a:r>
+              <a:t>1단계 경계 안 균등 샘플링</a:t>
+            </a:r>
+          </a:p>
+          <a:p>
+            <a:pPr>
+              <a:spcAft>
+                <a:spcPts val="1000"/>
+              </a:spcAft>
+            </a:pPr>
+            <a:r>
+              <a:rPr>
+                <a:solidFill>
+                  <a:srgbClr val="AFAFAF"/>
+                </a:solidFill>
+              </a:rPr>
+              <a:t>4.2  </a:t>
+            </a:r>
+            <a:r>
+              <a:t>2단계 도로 위 샘플링</a:t>
+            </a:r>
+          </a:p>
+          <a:p>
+            <a:pPr>
+              <a:spcAft>
+                <a:spcPts val="1000"/>
+              </a:spcAft>
+            </a:pPr>
+            <a:r>
+              <a:rPr>
+                <a:solidFill>
+                  <a:srgbClr val="AFAFAF"/>
+                </a:solidFill>
+              </a:rPr>
+              <a:t>4.3  </a:t>
+            </a:r>
+            <a:r>
+              <a:t>3단계 시간대 프로파일 반영</a:t>
+            </a:r>
+          </a:p>
+        </p:txBody>
+      </p:sp>
+    </p:spTree>
+  </p:cSld>
+  <p:clrMapOvr>
+    <a:masterClrMapping/>
+  </p:clrMapOvr>
+</p:sld>
+</file>
+
+<file path=ppt/slides/slide14.xml><?xml version="1.0" encoding="utf-8"?>
+<p:sld xmlns:a="http://schemas.openxmlformats.org/drawingml/2006/main" xmlns:p="http://schemas.openxmlformats.org/presentationml/2006/main" xmlns:r="http://schemas.openxmlformats.org/officeDocument/2006/relationships">
+  <p:cSld>
+    <p:spTree>
+      <p:nvGrpSpPr>
+        <p:cNvPr id="1" name=""/>
+        <p:cNvGrpSpPr/>
+        <p:nvPr/>
+      </p:nvGrpSpPr>
+      <p:grpSpPr/>
+      <p:sp>
+        <p:nvSpPr>
           <p:cNvPr id="2" name="Title 1"/>
           <p:cNvSpPr>
             <a:spLocks noGrp="1"/>
@@ -5516,7 +5747,7 @@
 </p:sld>
 </file>
 
-<file path=ppt/slides/slide14.xml><?xml version="1.0" encoding="utf-8"?>
+<file path=ppt/slides/slide15.xml><?xml version="1.0" encoding="utf-8"?>
 <p:sld xmlns:a="http://schemas.openxmlformats.org/drawingml/2006/main" xmlns:p="http://schemas.openxmlformats.org/presentationml/2006/main" xmlns:r="http://schemas.openxmlformats.org/officeDocument/2006/relationships">
   <p:cSld>
     <p:spTree>
@@ -5703,7 +5934,7 @@
 </p:sld>
 </file>
 
-<file path=ppt/slides/slide15.xml><?xml version="1.0" encoding="utf-8"?>
+<file path=ppt/slides/slide16.xml><?xml version="1.0" encoding="utf-8"?>
 <p:sld xmlns:a="http://schemas.openxmlformats.org/drawingml/2006/main" xmlns:p="http://schemas.openxmlformats.org/presentationml/2006/main" xmlns:r="http://schemas.openxmlformats.org/officeDocument/2006/relationships">
   <p:cSld>
     <p:spTree>
@@ -5840,100 +6071,6 @@
               <a:t>1004</a:t>
             </a:fld>
             <a:endParaRPr lang="en-US"/>
-          </a:p>
-        </p:txBody>
-      </p:sp>
-    </p:spTree>
-  </p:cSld>
-  <p:clrMapOvr>
-    <a:masterClrMapping/>
-  </p:clrMapOvr>
-</p:sld>
-</file>
-
-<file path=ppt/slides/slide16.xml><?xml version="1.0" encoding="utf-8"?>
-<p:sld xmlns:a="http://schemas.openxmlformats.org/drawingml/2006/main" xmlns:p="http://schemas.openxmlformats.org/presentationml/2006/main" xmlns:r="http://schemas.openxmlformats.org/officeDocument/2006/relationships">
-  <p:cSld>
-    <p:spTree>
-      <p:nvGrpSpPr>
-        <p:cNvPr id="1" name=""/>
-        <p:cNvGrpSpPr/>
-        <p:nvPr/>
-      </p:nvGrpSpPr>
-      <p:grpSpPr/>
-      <p:sp>
-        <p:nvSpPr>
-          <p:cNvPr id="2" name="Text Placeholder 1"/>
-          <p:cNvSpPr>
-            <a:spLocks noGrp="1"/>
-          </p:cNvSpPr>
-          <p:nvPr>
-            <p:ph type="body" idx="100"/>
-          </p:nvPr>
-        </p:nvSpPr>
-        <p:spPr/>
-        <p:txBody>
-          <a:bodyPr/>
-          <a:lstStyle/>
-          <a:p>
-            <a:r>
-              <a:t>05</a:t>
-            </a:r>
-          </a:p>
-        </p:txBody>
-      </p:sp>
-      <p:sp>
-        <p:nvSpPr>
-          <p:cNvPr id="3" name="Title 2"/>
-          <p:cNvSpPr>
-            <a:spLocks noGrp="1"/>
-          </p:cNvSpPr>
-          <p:nvPr>
-            <p:ph type="title" idx="101"/>
-          </p:nvPr>
-        </p:nvSpPr>
-        <p:spPr/>
-        <p:txBody>
-          <a:bodyPr/>
-          <a:lstStyle/>
-          <a:p>
-            <a:r>
-              <a:t>교재 8.8 엔진 투입</a:t>
-            </a:r>
-          </a:p>
-        </p:txBody>
-      </p:sp>
-      <p:sp>
-        <p:nvSpPr>
-          <p:cNvPr id="4" name="Text Placeholder 3"/>
-          <p:cNvSpPr>
-            <a:spLocks noGrp="1"/>
-          </p:cNvSpPr>
-          <p:nvPr>
-            <p:ph type="body" idx="102"/>
-          </p:nvPr>
-        </p:nvSpPr>
-        <p:spPr/>
-        <p:txBody>
-          <a:bodyPr/>
-          <a:lstStyle/>
-          <a:p>
-            <a:pPr>
-              <a:spcAft>
-                <a:spcPts val="1000"/>
-              </a:spcAft>
-            </a:pPr>
-            <a:r>
-              <a:rPr>
-                <a:solidFill>
-                  <a:srgbClr val="AFAFAF"/>
-                </a:solidFill>
-              </a:rPr>
-              <a:t>5.1  </a:t>
-            </a:r>
-            <a:r>
-              <a:t>만든 수요로 시뮬레이션 실행</a:t>
-            </a:r>
           </a:p>
         </p:txBody>
       </p:sp>
@@ -5957,12 +6094,12 @@
       <p:grpSpPr/>
       <p:sp>
         <p:nvSpPr>
-          <p:cNvPr id="2" name="Title 1"/>
-          <p:cNvSpPr>
-            <a:spLocks noGrp="1"/>
-          </p:cNvSpPr>
-          <p:nvPr>
-            <p:ph type="title" idx="100"/>
+          <p:cNvPr id="2" name="Text Placeholder 1"/>
+          <p:cNvSpPr>
+            <a:spLocks noGrp="1"/>
+          </p:cNvSpPr>
+          <p:nvPr>
+            <p:ph type="body" idx="100"/>
           </p:nvPr>
         </p:nvSpPr>
         <p:spPr/>
@@ -5971,19 +6108,19 @@
           <a:lstStyle/>
           <a:p>
             <a:r>
-              <a:t>5.1 만든 수요로 시뮬레이션 실행</a:t>
-            </a:r>
-          </a:p>
-        </p:txBody>
-      </p:sp>
-      <p:sp>
-        <p:nvSpPr>
-          <p:cNvPr id="3" name="Text Placeholder 2"/>
-          <p:cNvSpPr>
-            <a:spLocks noGrp="1"/>
-          </p:cNvSpPr>
-          <p:nvPr>
-            <p:ph type="body" idx="101"/>
+              <a:t>05</a:t>
+            </a:r>
+          </a:p>
+        </p:txBody>
+      </p:sp>
+      <p:sp>
+        <p:nvSpPr>
+          <p:cNvPr id="3" name="Title 2"/>
+          <p:cNvSpPr>
+            <a:spLocks noGrp="1"/>
+          </p:cNvSpPr>
+          <p:nvPr>
+            <p:ph type="title" idx="101"/>
           </p:nvPr>
         </p:nvSpPr>
         <p:spPr/>
@@ -5992,7 +6129,7 @@
           <a:lstStyle/>
           <a:p>
             <a:r>
-              <a:t>5. 교재 8.8 엔진 투입</a:t>
+              <a:t>교재 8.8 엔진 투입</a:t>
             </a:r>
           </a:p>
         </p:txBody>
@@ -6012,76 +6149,22 @@
           <a:bodyPr/>
           <a:lstStyle/>
           <a:p>
-            <a:pPr/>
-            <a:r>
-              <a:t>순서: 수요 생성 → 서버 업로드 → 조건을 바꿔 반복 실행</a:t>
-            </a:r>
-          </a:p>
-          <a:p>
-            <a:pPr/>
-            <a:r>
-              <a:t>업로드 함수가 내부에서 형식 검증을 먼저 수행</a:t>
-            </a:r>
-          </a:p>
-          <a:p>
-            <a:pPr/>
-            <a:r>
-              <a:t>형식이 틀린 수요는 업로드 단계에서 차단</a:t>
-            </a:r>
-          </a:p>
-          <a:p>
-            <a:pPr/>
-            <a:r>
-              <a:t>기말 프로젝트도 같은 순서로 진행</a:t>
-            </a:r>
-          </a:p>
-        </p:txBody>
-      </p:sp>
-      <p:sp>
-        <p:nvSpPr>
-          <p:cNvPr id="25" name="Slide Number Placeholder 0"/>
-          <p:cNvSpPr>
-            <a:spLocks noGrp="1"/>
-          </p:cNvSpPr>
-          <p:nvPr>
-            <p:ph type="sldNum" sz="quarter" idx="4294967295"/>
-          </p:nvPr>
-        </p:nvSpPr>
-        <p:spPr>
-          <a:xfrm>
-            <a:off x="10591495" y="6355080"/>
-            <a:ext cx="914400" cy="274320"/>
-          </a:xfrm>
-          <a:prstGeom prst="rect">
-            <a:avLst/>
-          </a:prstGeom>
-          <a:extLst>
-            <a:ext uri="{C572A759-6A51-4108-AA02-DFA0A04FC94B}">
-              <ma14:wrappingTextBoxFlag xmlns:ma14="http://schemas.microsoft.com/office/mac/drawingml/2011/main" val="0"/>
-            </a:ext>
-          </a:extLst>
-        </p:spPr>
-        <p:txBody>
-          <a:bodyPr/>
-          <a:lstStyle>
-            <a:lvl1pPr>
-              <a:defRPr sz="1000">
+            <a:pPr>
+              <a:spcAft>
+                <a:spcPts val="1000"/>
+              </a:spcAft>
+            </a:pPr>
+            <a:r>
+              <a:rPr>
                 <a:solidFill>
                   <a:srgbClr val="AFAFAF"/>
                 </a:solidFill>
-                <a:latin typeface="Pretendard Medium"/>
-                <a:ea typeface="Pretendard Medium"/>
-                <a:cs typeface="Pretendard Medium"/>
-              </a:defRPr>
-            </a:lvl1pPr>
-          </a:lstStyle>
-          <a:p>
-            <a:pPr algn="r"/>
-            <a:fld id="{F7021451-1387-4CA6-816F-3879F97B5CBC}" type="slidenum">
-              <a:rPr b="0" lang="en-US"/>
-              <a:t>1004</a:t>
-            </a:fld>
-            <a:endParaRPr lang="en-US"/>
+              </a:rPr>
+              <a:t>5.1  </a:t>
+            </a:r>
+            <a:r>
+              <a:t>만든 수요로 시뮬레이션 실행</a:t>
+            </a:r>
           </a:p>
         </p:txBody>
       </p:sp>
@@ -6105,12 +6188,12 @@
       <p:grpSpPr/>
       <p:sp>
         <p:nvSpPr>
-          <p:cNvPr id="2" name="Text Placeholder 1"/>
-          <p:cNvSpPr>
-            <a:spLocks noGrp="1"/>
-          </p:cNvSpPr>
-          <p:nvPr>
-            <p:ph type="body" idx="100"/>
+          <p:cNvPr id="2" name="Title 1"/>
+          <p:cNvSpPr>
+            <a:spLocks noGrp="1"/>
+          </p:cNvSpPr>
+          <p:nvPr>
+            <p:ph type="title" idx="100"/>
           </p:nvPr>
         </p:nvSpPr>
         <p:spPr/>
@@ -6119,19 +6202,19 @@
           <a:lstStyle/>
           <a:p>
             <a:r>
-              <a:t>06</a:t>
-            </a:r>
-          </a:p>
-        </p:txBody>
-      </p:sp>
-      <p:sp>
-        <p:nvSpPr>
-          <p:cNvPr id="3" name="Title 2"/>
-          <p:cNvSpPr>
-            <a:spLocks noGrp="1"/>
-          </p:cNvSpPr>
-          <p:nvPr>
-            <p:ph type="title" idx="101"/>
+              <a:t>5.1 만든 수요로 시뮬레이션 실행</a:t>
+            </a:r>
+          </a:p>
+        </p:txBody>
+      </p:sp>
+      <p:sp>
+        <p:nvSpPr>
+          <p:cNvPr id="3" name="Text Placeholder 2"/>
+          <p:cNvSpPr>
+            <a:spLocks noGrp="1"/>
+          </p:cNvSpPr>
+          <p:nvPr>
+            <p:ph type="body" idx="101"/>
           </p:nvPr>
         </p:nvSpPr>
         <p:spPr/>
@@ -6140,7 +6223,7 @@
           <a:lstStyle/>
           <a:p>
             <a:r>
-              <a:t>정리와 연습</a:t>
+              <a:t>5. 교재 8.8 엔진 투입</a:t>
             </a:r>
           </a:p>
         </p:txBody>
@@ -6160,40 +6243,76 @@
           <a:bodyPr/>
           <a:lstStyle/>
           <a:p>
-            <a:pPr>
-              <a:spcAft>
-                <a:spcPts val="1000"/>
-              </a:spcAft>
-            </a:pPr>
-            <a:r>
-              <a:rPr>
+            <a:pPr/>
+            <a:r>
+              <a:t>순서: 수요 생성 → 서버 업로드 → 조건을 바꿔 반복 실행</a:t>
+            </a:r>
+          </a:p>
+          <a:p>
+            <a:pPr/>
+            <a:r>
+              <a:t>업로드 함수가 내부에서 형식 검증을 먼저 수행</a:t>
+            </a:r>
+          </a:p>
+          <a:p>
+            <a:pPr/>
+            <a:r>
+              <a:t>형식이 틀린 수요는 업로드 단계에서 차단</a:t>
+            </a:r>
+          </a:p>
+          <a:p>
+            <a:pPr/>
+            <a:r>
+              <a:t>기말 프로젝트도 같은 순서로 진행</a:t>
+            </a:r>
+          </a:p>
+        </p:txBody>
+      </p:sp>
+      <p:sp>
+        <p:nvSpPr>
+          <p:cNvPr id="25" name="Slide Number Placeholder 0"/>
+          <p:cNvSpPr>
+            <a:spLocks noGrp="1"/>
+          </p:cNvSpPr>
+          <p:nvPr>
+            <p:ph type="sldNum" sz="quarter" idx="4294967295"/>
+          </p:nvPr>
+        </p:nvSpPr>
+        <p:spPr>
+          <a:xfrm>
+            <a:off x="10591495" y="6355080"/>
+            <a:ext cx="914400" cy="274320"/>
+          </a:xfrm>
+          <a:prstGeom prst="rect">
+            <a:avLst/>
+          </a:prstGeom>
+          <a:extLst>
+            <a:ext uri="{C572A759-6A51-4108-AA02-DFA0A04FC94B}">
+              <ma14:wrappingTextBoxFlag xmlns:ma14="http://schemas.microsoft.com/office/mac/drawingml/2011/main" val="0"/>
+            </a:ext>
+          </a:extLst>
+        </p:spPr>
+        <p:txBody>
+          <a:bodyPr/>
+          <a:lstStyle>
+            <a:lvl1pPr>
+              <a:defRPr sz="1000">
                 <a:solidFill>
                   <a:srgbClr val="AFAFAF"/>
                 </a:solidFill>
-              </a:rPr>
-              <a:t>6.1  </a:t>
-            </a:r>
-            <a:r>
-              <a:t>오늘의 정리</a:t>
-            </a:r>
-          </a:p>
-          <a:p>
-            <a:pPr>
-              <a:spcAft>
-                <a:spcPts val="1000"/>
-              </a:spcAft>
-            </a:pPr>
-            <a:r>
-              <a:rPr>
-                <a:solidFill>
-                  <a:srgbClr val="AFAFAF"/>
-                </a:solidFill>
-              </a:rPr>
-              <a:t>6.2  </a:t>
-            </a:r>
-            <a:r>
-              <a:t>연습과 다음 장</a:t>
-            </a:r>
+                <a:latin typeface="Pretendard Medium"/>
+                <a:ea typeface="Pretendard Medium"/>
+                <a:cs typeface="Pretendard Medium"/>
+              </a:defRPr>
+            </a:lvl1pPr>
+          </a:lstStyle>
+          <a:p>
+            <a:pPr algn="r"/>
+            <a:fld id="{F7021451-1387-4CA6-816F-3879F97B5CBC}" type="slidenum">
+              <a:rPr b="0" lang="en-US"/>
+              <a:t>1004</a:t>
+            </a:fld>
+            <a:endParaRPr lang="en-US"/>
           </a:p>
         </p:txBody>
       </p:sp>
@@ -6217,12 +6336,12 @@
       <p:grpSpPr/>
       <p:sp>
         <p:nvSpPr>
-          <p:cNvPr id="2" name="Title 1"/>
-          <p:cNvSpPr>
-            <a:spLocks noGrp="1"/>
-          </p:cNvSpPr>
-          <p:nvPr>
-            <p:ph type="title" idx="100"/>
+          <p:cNvPr id="2" name="Text Placeholder 1"/>
+          <p:cNvSpPr>
+            <a:spLocks noGrp="1"/>
+          </p:cNvSpPr>
+          <p:nvPr>
+            <p:ph type="body" idx="100"/>
           </p:nvPr>
         </p:nvSpPr>
         <p:spPr/>
@@ -6231,19 +6350,19 @@
           <a:lstStyle/>
           <a:p>
             <a:r>
-              <a:t>6.1 오늘의 정리</a:t>
-            </a:r>
-          </a:p>
-        </p:txBody>
-      </p:sp>
-      <p:sp>
-        <p:nvSpPr>
-          <p:cNvPr id="3" name="Text Placeholder 2"/>
-          <p:cNvSpPr>
-            <a:spLocks noGrp="1"/>
-          </p:cNvSpPr>
-          <p:nvPr>
-            <p:ph type="body" idx="101"/>
+              <a:t>06</a:t>
+            </a:r>
+          </a:p>
+        </p:txBody>
+      </p:sp>
+      <p:sp>
+        <p:nvSpPr>
+          <p:cNvPr id="3" name="Title 2"/>
+          <p:cNvSpPr>
+            <a:spLocks noGrp="1"/>
+          </p:cNvSpPr>
+          <p:nvPr>
+            <p:ph type="title" idx="101"/>
           </p:nvPr>
         </p:nvSpPr>
         <p:spPr/>
@@ -6252,7 +6371,7 @@
           <a:lstStyle/>
           <a:p>
             <a:r>
-              <a:t>6. 정리와 연습</a:t>
+              <a:t>정리와 연습</a:t>
             </a:r>
           </a:p>
         </p:txBody>
@@ -6272,76 +6391,40 @@
           <a:bodyPr/>
           <a:lstStyle/>
           <a:p>
-            <a:pPr/>
-            <a:r>
-              <a:t>O-D 표는 집계 자료 — 개인 기록이 아니므로 개인 단위로 분해 필요</a:t>
-            </a:r>
-          </a:p>
-          <a:p>
-            <a:pPr/>
-            <a:r>
-              <a:t>하남 통행은 오전 7~8시와 오후 5~6시에 봉우리, 54%가 하남 안에서 종료</a:t>
-            </a:r>
-          </a:p>
-          <a:p>
-            <a:pPr/>
-            <a:r>
-              <a:t>시뮬레이터 수요 형식은 호출 시각과 출발·도착 좌표 다섯 개</a:t>
-            </a:r>
-          </a:p>
-          <a:p>
-            <a:pPr/>
-            <a:r>
-              <a:t>생성 3단계: 경계 안 균등 → 도로 위 → 시간대 프로파일 반영</a:t>
-            </a:r>
-          </a:p>
-        </p:txBody>
-      </p:sp>
-      <p:sp>
-        <p:nvSpPr>
-          <p:cNvPr id="25" name="Slide Number Placeholder 0"/>
-          <p:cNvSpPr>
-            <a:spLocks noGrp="1"/>
-          </p:cNvSpPr>
-          <p:nvPr>
-            <p:ph type="sldNum" sz="quarter" idx="4294967295"/>
-          </p:nvPr>
-        </p:nvSpPr>
-        <p:spPr>
-          <a:xfrm>
-            <a:off x="10591495" y="6355080"/>
-            <a:ext cx="914400" cy="274320"/>
-          </a:xfrm>
-          <a:prstGeom prst="rect">
-            <a:avLst/>
-          </a:prstGeom>
-          <a:extLst>
-            <a:ext uri="{C572A759-6A51-4108-AA02-DFA0A04FC94B}">
-              <ma14:wrappingTextBoxFlag xmlns:ma14="http://schemas.microsoft.com/office/mac/drawingml/2011/main" val="0"/>
-            </a:ext>
-          </a:extLst>
-        </p:spPr>
-        <p:txBody>
-          <a:bodyPr/>
-          <a:lstStyle>
-            <a:lvl1pPr>
-              <a:defRPr sz="1000">
+            <a:pPr>
+              <a:spcAft>
+                <a:spcPts val="1000"/>
+              </a:spcAft>
+            </a:pPr>
+            <a:r>
+              <a:rPr>
                 <a:solidFill>
                   <a:srgbClr val="AFAFAF"/>
                 </a:solidFill>
-                <a:latin typeface="Pretendard Medium"/>
-                <a:ea typeface="Pretendard Medium"/>
-                <a:cs typeface="Pretendard Medium"/>
-              </a:defRPr>
-            </a:lvl1pPr>
-          </a:lstStyle>
-          <a:p>
-            <a:pPr algn="r"/>
-            <a:fld id="{F7021451-1387-4CA6-816F-3879F97B5CBC}" type="slidenum">
-              <a:rPr b="0" lang="en-US"/>
-              <a:t>1004</a:t>
-            </a:fld>
-            <a:endParaRPr lang="en-US"/>
+              </a:rPr>
+              <a:t>6.1  </a:t>
+            </a:r>
+            <a:r>
+              <a:t>오늘의 정리</a:t>
+            </a:r>
+          </a:p>
+          <a:p>
+            <a:pPr>
+              <a:spcAft>
+                <a:spcPts val="1000"/>
+              </a:spcAft>
+            </a:pPr>
+            <a:r>
+              <a:rPr>
+                <a:solidFill>
+                  <a:srgbClr val="AFAFAF"/>
+                </a:solidFill>
+              </a:rPr>
+              <a:t>6.2  </a:t>
+            </a:r>
+            <a:r>
+              <a:t>연습과 다음 장</a:t>
+            </a:r>
           </a:p>
         </p:txBody>
       </p:sp>
@@ -6513,7 +6596,7 @@
                           </a:solidFill>
                           <a:latin typeface="Pretendard Medium"/>
                         </a:rPr>
-                        <a:t>1.1 승객 990명의 출처  ·  1.2 학습 목표</a:t>
+                        <a:t>1.1 승객 990명의 출처  ·  1.2 학습 목표  ·  1.3 교재와 실습을 여는 곳</a:t>
                       </a:r>
                     </a:p>
                   </a:txBody>
@@ -7174,7 +7257,7 @@
           <a:lstStyle/>
           <a:p>
             <a:r>
-              <a:t>6.2 연습과 다음 장</a:t>
+              <a:t>6.1 오늘의 정리</a:t>
             </a:r>
           </a:p>
         </p:txBody>
@@ -7217,37 +7300,25 @@
           <a:p>
             <a:pPr/>
             <a:r>
-              <a:t>연습 8.1 ★ — 통행량 상위 행정동 쌍 10개, 오전과 저녁의 순서 역전</a:t>
-            </a:r>
-          </a:p>
-          <a:p>
-            <a:pPr lvl="1"/>
-            <a:r>
-              <a:t>산출물: 시간대별 상위 10쌍 표, 역전의 의미 2~3줄</a:t>
+              <a:t>O-D 표는 집계 자료 — 개인 기록이 아니므로 개인 단위로 분해 필요</a:t>
             </a:r>
           </a:p>
           <a:p>
             <a:pPr/>
             <a:r>
-              <a:t>연습 8.2 ★★ — 출발지와 목적지를 쌍으로 추출하도록 개선</a:t>
-            </a:r>
-          </a:p>
-          <a:p>
-            <a:pPr lvl="1"/>
-            <a:r>
-              <a:t>산출물: 구현 코드, 기존 방식과의 통행거리 분포 비교 그래프</a:t>
+              <a:t>하남 통행은 오전 7~8시와 오후 5~6시에 봉우리, 54%가 하남 안에서 종료</a:t>
             </a:r>
           </a:p>
           <a:p>
             <a:pPr/>
             <a:r>
-              <a:t>연습 8.3 ★★★ — 하남시 하루 택시 수요 추정과 민감도 분석</a:t>
+              <a:t>시뮬레이터 수요 형식은 호출 시각과 출발·도착 좌표 다섯 개</a:t>
             </a:r>
           </a:p>
           <a:p>
             <a:pPr/>
             <a:r>
-              <a:t>다음: 오후에 12장 지표와 결과 읽기</a:t>
+              <a:t>생성 3단계: 경계 안 균등 → 도로 위 → 시간대 프로파일 반영</a:t>
             </a:r>
           </a:p>
         </p:txBody>
@@ -7334,6 +7405,166 @@
           <a:lstStyle/>
           <a:p>
             <a:r>
+              <a:t>6.2 연습과 다음 장</a:t>
+            </a:r>
+          </a:p>
+        </p:txBody>
+      </p:sp>
+      <p:sp>
+        <p:nvSpPr>
+          <p:cNvPr id="3" name="Text Placeholder 2"/>
+          <p:cNvSpPr>
+            <a:spLocks noGrp="1"/>
+          </p:cNvSpPr>
+          <p:nvPr>
+            <p:ph type="body" idx="101"/>
+          </p:nvPr>
+        </p:nvSpPr>
+        <p:spPr/>
+        <p:txBody>
+          <a:bodyPr/>
+          <a:lstStyle/>
+          <a:p>
+            <a:r>
+              <a:t>6. 정리와 연습</a:t>
+            </a:r>
+          </a:p>
+        </p:txBody>
+      </p:sp>
+      <p:sp>
+        <p:nvSpPr>
+          <p:cNvPr id="4" name="Text Placeholder 3"/>
+          <p:cNvSpPr>
+            <a:spLocks noGrp="1"/>
+          </p:cNvSpPr>
+          <p:nvPr>
+            <p:ph type="body" idx="102"/>
+          </p:nvPr>
+        </p:nvSpPr>
+        <p:spPr/>
+        <p:txBody>
+          <a:bodyPr/>
+          <a:lstStyle/>
+          <a:p>
+            <a:pPr/>
+            <a:r>
+              <a:t>연습 8.1 ★ — 통행량 상위 행정동 쌍 10개, 오전과 저녁의 순서 역전</a:t>
+            </a:r>
+          </a:p>
+          <a:p>
+            <a:pPr lvl="1"/>
+            <a:r>
+              <a:t>산출물: 시간대별 상위 10쌍 표, 역전의 의미 2~3줄</a:t>
+            </a:r>
+          </a:p>
+          <a:p>
+            <a:pPr/>
+            <a:r>
+              <a:t>연습 8.2 ★★ — 출발지와 목적지를 쌍으로 추출하도록 개선</a:t>
+            </a:r>
+          </a:p>
+          <a:p>
+            <a:pPr lvl="1"/>
+            <a:r>
+              <a:t>산출물: 구현 코드, 기존 방식과의 통행거리 분포 비교 그래프</a:t>
+            </a:r>
+          </a:p>
+          <a:p>
+            <a:pPr/>
+            <a:r>
+              <a:t>연습 8.3 ★★★ — 하남시 하루 택시 수요 추정과 민감도 분석</a:t>
+            </a:r>
+          </a:p>
+          <a:p>
+            <a:pPr/>
+            <a:r>
+              <a:t>다음: 오후에 12장 지표와 결과 읽기</a:t>
+            </a:r>
+          </a:p>
+        </p:txBody>
+      </p:sp>
+      <p:sp>
+        <p:nvSpPr>
+          <p:cNvPr id="25" name="Slide Number Placeholder 0"/>
+          <p:cNvSpPr>
+            <a:spLocks noGrp="1"/>
+          </p:cNvSpPr>
+          <p:nvPr>
+            <p:ph type="sldNum" sz="quarter" idx="4294967295"/>
+          </p:nvPr>
+        </p:nvSpPr>
+        <p:spPr>
+          <a:xfrm>
+            <a:off x="10591495" y="6355080"/>
+            <a:ext cx="914400" cy="274320"/>
+          </a:xfrm>
+          <a:prstGeom prst="rect">
+            <a:avLst/>
+          </a:prstGeom>
+          <a:extLst>
+            <a:ext uri="{C572A759-6A51-4108-AA02-DFA0A04FC94B}">
+              <ma14:wrappingTextBoxFlag xmlns:ma14="http://schemas.microsoft.com/office/mac/drawingml/2011/main" val="0"/>
+            </a:ext>
+          </a:extLst>
+        </p:spPr>
+        <p:txBody>
+          <a:bodyPr/>
+          <a:lstStyle>
+            <a:lvl1pPr>
+              <a:defRPr sz="1000">
+                <a:solidFill>
+                  <a:srgbClr val="AFAFAF"/>
+                </a:solidFill>
+                <a:latin typeface="Pretendard Medium"/>
+                <a:ea typeface="Pretendard Medium"/>
+                <a:cs typeface="Pretendard Medium"/>
+              </a:defRPr>
+            </a:lvl1pPr>
+          </a:lstStyle>
+          <a:p>
+            <a:pPr algn="r"/>
+            <a:fld id="{F7021451-1387-4CA6-816F-3879F97B5CBC}" type="slidenum">
+              <a:rPr b="0" lang="en-US"/>
+              <a:t>1004</a:t>
+            </a:fld>
+            <a:endParaRPr lang="en-US"/>
+          </a:p>
+        </p:txBody>
+      </p:sp>
+    </p:spTree>
+  </p:cSld>
+  <p:clrMapOvr>
+    <a:masterClrMapping/>
+  </p:clrMapOvr>
+</p:sld>
+</file>
+
+<file path=ppt/slides/slide22.xml><?xml version="1.0" encoding="utf-8"?>
+<p:sld xmlns:a="http://schemas.openxmlformats.org/drawingml/2006/main" xmlns:p="http://schemas.openxmlformats.org/presentationml/2006/main" xmlns:r="http://schemas.openxmlformats.org/officeDocument/2006/relationships">
+  <p:cSld>
+    <p:spTree>
+      <p:nvGrpSpPr>
+        <p:cNvPr id="1" name=""/>
+        <p:cNvGrpSpPr/>
+        <p:nvPr/>
+      </p:nvGrpSpPr>
+      <p:grpSpPr/>
+      <p:sp>
+        <p:nvSpPr>
+          <p:cNvPr id="2" name="Title 1"/>
+          <p:cNvSpPr>
+            <a:spLocks noGrp="1"/>
+          </p:cNvSpPr>
+          <p:nvPr>
+            <p:ph type="title" idx="100"/>
+          </p:nvPr>
+        </p:nvSpPr>
+        <p:spPr/>
+        <p:txBody>
+          <a:bodyPr/>
+          <a:lstStyle/>
+          <a:p>
+            <a:r>
               <a:t>수요일에 봅니다</a:t>
             </a:r>
           </a:p>
@@ -7491,6 +7722,24 @@
               <a:t>학습 목표</a:t>
             </a:r>
           </a:p>
+          <a:p>
+            <a:pPr>
+              <a:spcAft>
+                <a:spcPts val="1000"/>
+              </a:spcAft>
+            </a:pPr>
+            <a:r>
+              <a:rPr>
+                <a:solidFill>
+                  <a:srgbClr val="AFAFAF"/>
+                </a:solidFill>
+              </a:rPr>
+              <a:t>1.3  </a:t>
+            </a:r>
+            <a:r>
+              <a:t>교재와 실습을 여는 곳</a:t>
+            </a:r>
+          </a:p>
         </p:txBody>
       </p:sp>
     </p:spTree>
@@ -7809,12 +8058,12 @@
       <p:grpSpPr/>
       <p:sp>
         <p:nvSpPr>
-          <p:cNvPr id="2" name="Text Placeholder 1"/>
-          <p:cNvSpPr>
-            <a:spLocks noGrp="1"/>
-          </p:cNvSpPr>
-          <p:nvPr>
-            <p:ph type="body" idx="100"/>
+          <p:cNvPr id="2" name="Title 1"/>
+          <p:cNvSpPr>
+            <a:spLocks noGrp="1"/>
+          </p:cNvSpPr>
+          <p:nvPr>
+            <p:ph type="title" idx="100"/>
           </p:nvPr>
         </p:nvSpPr>
         <p:spPr/>
@@ -7823,19 +8072,19 @@
           <a:lstStyle/>
           <a:p>
             <a:r>
-              <a:t>02</a:t>
-            </a:r>
-          </a:p>
-        </p:txBody>
-      </p:sp>
-      <p:sp>
-        <p:nvSpPr>
-          <p:cNvPr id="3" name="Title 2"/>
-          <p:cNvSpPr>
-            <a:spLocks noGrp="1"/>
-          </p:cNvSpPr>
-          <p:nvPr>
-            <p:ph type="title" idx="101"/>
+              <a:t>1.3 교재와 실습을 여는 곳</a:t>
+            </a:r>
+          </a:p>
+        </p:txBody>
+      </p:sp>
+      <p:sp>
+        <p:nvSpPr>
+          <p:cNvPr id="3" name="Text Placeholder 2"/>
+          <p:cNvSpPr>
+            <a:spLocks noGrp="1"/>
+          </p:cNvSpPr>
+          <p:nvPr>
+            <p:ph type="body" idx="101"/>
           </p:nvPr>
         </p:nvSpPr>
         <p:spPr/>
@@ -7844,7 +8093,7 @@
           <a:lstStyle/>
           <a:p>
             <a:r>
-              <a:t>교재 8.1–8.3 O-D 데이터와 패턴</a:t>
+              <a:t>1. 도입과 학습 목표</a:t>
             </a:r>
           </a:p>
         </p:txBody>
@@ -7864,58 +8113,335 @@
           <a:bodyPr/>
           <a:lstStyle/>
           <a:p>
-            <a:pPr>
-              <a:spcAft>
-                <a:spcPts val="1000"/>
-              </a:spcAft>
-            </a:pPr>
-            <a:r>
-              <a:rPr>
+            <a:pPr/>
+            <a:r>
+              <a:t>저장소: github.com/jihoyeo/mobility-simulation-book — blob/main 아래 경로</a:t>
+            </a:r>
+          </a:p>
+          <a:p>
+            <a:pPr/>
+            <a:r>
+              <a:t>노트북 실행: jupyter lab labs/ch08_demand.ipynb</a:t>
+            </a:r>
+          </a:p>
+          <a:p>
+            <a:pPr/>
+            <a:r>
+              <a:t>진행 순서: 슬라이드 개요 → 교재 본문 → 실습 노트북</a:t>
+            </a:r>
+          </a:p>
+        </p:txBody>
+      </p:sp>
+      <p:sp>
+        <p:nvSpPr>
+          <p:cNvPr id="5" name="Text Placeholder 4"/>
+          <p:cNvSpPr>
+            <a:spLocks noGrp="1"/>
+          </p:cNvSpPr>
+          <p:nvPr>
+            <p:ph type="body" idx="103"/>
+          </p:nvPr>
+        </p:nvSpPr>
+        <p:spPr/>
+        <p:txBody>
+          <a:bodyPr/>
+          <a:lstStyle/>
+          <a:p>
+            <a:r>
+              <a:t>표 1. 오늘 여는 파일과 경로</a:t>
+            </a:r>
+          </a:p>
+        </p:txBody>
+      </p:sp>
+      <p:graphicFrame>
+        <p:nvGraphicFramePr>
+          <p:cNvPr id="6" name="Table Placeholder 5"/>
+          <p:cNvGraphicFramePr>
+            <a:graphicFrameLocks noGrp="1"/>
+          </p:cNvGraphicFramePr>
+          <p:nvPr>
+            <p:ph type="tbl" idx="104"/>
+          </p:nvPr>
+        </p:nvGraphicFramePr>
+        <p:xfrm>
+          <a:off x="4937760" y="1828800"/>
+          <a:ext cx="6565392" cy="1676400"/>
+        </p:xfrm>
+        <a:graphic>
+          <a:graphicData uri="http://schemas.openxmlformats.org/drawingml/2006/table">
+            <a:tbl>
+              <a:tblPr firstRow="0" bandRow="0" firstCol="0" lastRow="0" lastCol="0" bandCol="0"/>
+              <a:tblGrid>
+                <a:gridCol w="3282696"/>
+                <a:gridCol w="3282696"/>
+              </a:tblGrid>
+              <a:tr h="406400">
+                <a:tc>
+                  <a:txBody>
+                    <a:bodyPr/>
+                    <a:lstStyle/>
+                    <a:p>
+                      <a:r>
+                        <a:rPr sz="1300" b="0">
+                          <a:solidFill>
+                            <a:srgbClr val="FFFFFF"/>
+                          </a:solidFill>
+                          <a:latin typeface="Pretendard Medium"/>
+                        </a:rPr>
+                        <a:t>자료</a:t>
+                      </a:r>
+                    </a:p>
+                  </a:txBody>
+                  <a:tcPr marL="101600" marR="101600" marT="76200" marB="76200" anchor="ctr">
+                    <a:solidFill>
+                      <a:srgbClr val="000000"/>
+                    </a:solidFill>
+                    <a:lnL w="0">
+                      <a:noFill/>
+                    </a:lnL>
+                    <a:lnR w="0">
+                      <a:noFill/>
+                    </a:lnR>
+                    <a:lnT w="0">
+                      <a:noFill/>
+                    </a:lnT>
+                    <a:lnB w="0">
+                      <a:noFill/>
+                    </a:lnB>
+                  </a:tcPr>
+                </a:tc>
+                <a:tc>
+                  <a:txBody>
+                    <a:bodyPr/>
+                    <a:lstStyle/>
+                    <a:p>
+                      <a:r>
+                        <a:rPr sz="1300" b="0">
+                          <a:solidFill>
+                            <a:srgbClr val="FFFFFF"/>
+                          </a:solidFill>
+                          <a:latin typeface="Pretendard Medium"/>
+                        </a:rPr>
+                        <a:t>경로</a:t>
+                      </a:r>
+                    </a:p>
+                  </a:txBody>
+                  <a:tcPr marL="101600" marR="101600" marT="76200" marB="76200" anchor="ctr">
+                    <a:solidFill>
+                      <a:srgbClr val="000000"/>
+                    </a:solidFill>
+                    <a:lnL w="0">
+                      <a:noFill/>
+                    </a:lnL>
+                    <a:lnR w="0">
+                      <a:noFill/>
+                    </a:lnR>
+                    <a:lnT w="0">
+                      <a:noFill/>
+                    </a:lnT>
+                    <a:lnB w="0">
+                      <a:noFill/>
+                    </a:lnB>
+                  </a:tcPr>
+                </a:tc>
+              </a:tr>
+              <a:tr h="635000">
+                <a:tc>
+                  <a:txBody>
+                    <a:bodyPr/>
+                    <a:lstStyle/>
+                    <a:p>
+                      <a:r>
+                        <a:rPr sz="1300" b="1">
+                          <a:solidFill>
+                            <a:srgbClr val="000000"/>
+                          </a:solidFill>
+                          <a:latin typeface="Pretendard"/>
+                        </a:rPr>
+                        <a:t>교재 원고</a:t>
+                      </a:r>
+                    </a:p>
+                  </a:txBody>
+                  <a:tcPr marL="101600" marR="101600" marT="101600" marB="101600" anchor="ctr">
+                    <a:solidFill>
+                      <a:srgbClr val="FFFFFF"/>
+                    </a:solidFill>
+                    <a:lnL w="0">
+                      <a:noFill/>
+                    </a:lnL>
+                    <a:lnR w="0">
+                      <a:noFill/>
+                    </a:lnR>
+                    <a:lnT w="0">
+                      <a:noFill/>
+                    </a:lnT>
+                    <a:lnB w="9525">
+                      <a:solidFill>
+                        <a:srgbClr val="E2E2E2"/>
+                      </a:solidFill>
+                    </a:lnB>
+                  </a:tcPr>
+                </a:tc>
+                <a:tc>
+                  <a:txBody>
+                    <a:bodyPr/>
+                    <a:lstStyle/>
+                    <a:p>
+                      <a:r>
+                        <a:rPr sz="1300" b="0">
+                          <a:solidFill>
+                            <a:srgbClr val="5E5E5E"/>
+                          </a:solidFill>
+                          <a:latin typeface="Pretendard Medium"/>
+                        </a:rPr>
+                        <a:t>ko/ch08_demand.md</a:t>
+                      </a:r>
+                    </a:p>
+                  </a:txBody>
+                  <a:tcPr marL="101600" marR="101600" marT="101600" marB="101600" anchor="ctr">
+                    <a:solidFill>
+                      <a:srgbClr val="FFFFFF"/>
+                    </a:solidFill>
+                    <a:lnL w="0">
+                      <a:noFill/>
+                    </a:lnL>
+                    <a:lnR w="0">
+                      <a:noFill/>
+                    </a:lnR>
+                    <a:lnT w="0">
+                      <a:noFill/>
+                    </a:lnT>
+                    <a:lnB w="9525">
+                      <a:solidFill>
+                        <a:srgbClr val="E2E2E2"/>
+                      </a:solidFill>
+                    </a:lnB>
+                  </a:tcPr>
+                </a:tc>
+              </a:tr>
+              <a:tr h="635000">
+                <a:tc>
+                  <a:txBody>
+                    <a:bodyPr/>
+                    <a:lstStyle/>
+                    <a:p>
+                      <a:r>
+                        <a:rPr sz="1300" b="1">
+                          <a:solidFill>
+                            <a:srgbClr val="000000"/>
+                          </a:solidFill>
+                          <a:latin typeface="Pretendard"/>
+                        </a:rPr>
+                        <a:t>실습 노트북</a:t>
+                      </a:r>
+                    </a:p>
+                  </a:txBody>
+                  <a:tcPr marL="101600" marR="101600" marT="101600" marB="101600" anchor="ctr">
+                    <a:solidFill>
+                      <a:srgbClr val="FFFFFF"/>
+                    </a:solidFill>
+                    <a:lnL w="0">
+                      <a:noFill/>
+                    </a:lnL>
+                    <a:lnR w="0">
+                      <a:noFill/>
+                    </a:lnR>
+                    <a:lnT w="0">
+                      <a:noFill/>
+                    </a:lnT>
+                    <a:lnB w="9525">
+                      <a:solidFill>
+                        <a:srgbClr val="E2E2E2"/>
+                      </a:solidFill>
+                    </a:lnB>
+                  </a:tcPr>
+                </a:tc>
+                <a:tc>
+                  <a:txBody>
+                    <a:bodyPr/>
+                    <a:lstStyle/>
+                    <a:p>
+                      <a:r>
+                        <a:rPr sz="1300" b="0">
+                          <a:solidFill>
+                            <a:srgbClr val="5E5E5E"/>
+                          </a:solidFill>
+                          <a:latin typeface="Pretendard Medium"/>
+                        </a:rPr>
+                        <a:t>labs/ch08_demand.ipynb</a:t>
+                      </a:r>
+                    </a:p>
+                  </a:txBody>
+                  <a:tcPr marL="101600" marR="101600" marT="101600" marB="101600" anchor="ctr">
+                    <a:solidFill>
+                      <a:srgbClr val="FFFFFF"/>
+                    </a:solidFill>
+                    <a:lnL w="0">
+                      <a:noFill/>
+                    </a:lnL>
+                    <a:lnR w="0">
+                      <a:noFill/>
+                    </a:lnR>
+                    <a:lnT w="0">
+                      <a:noFill/>
+                    </a:lnT>
+                    <a:lnB w="9525">
+                      <a:solidFill>
+                        <a:srgbClr val="E2E2E2"/>
+                      </a:solidFill>
+                    </a:lnB>
+                  </a:tcPr>
+                </a:tc>
+              </a:tr>
+            </a:tbl>
+          </a:graphicData>
+        </a:graphic>
+      </p:graphicFrame>
+      <p:sp>
+        <p:nvSpPr>
+          <p:cNvPr id="25" name="Slide Number Placeholder 0"/>
+          <p:cNvSpPr>
+            <a:spLocks noGrp="1"/>
+          </p:cNvSpPr>
+          <p:nvPr>
+            <p:ph type="sldNum" sz="quarter" idx="4294967295"/>
+          </p:nvPr>
+        </p:nvSpPr>
+        <p:spPr>
+          <a:xfrm>
+            <a:off x="10591495" y="6355080"/>
+            <a:ext cx="914400" cy="274320"/>
+          </a:xfrm>
+          <a:prstGeom prst="rect">
+            <a:avLst/>
+          </a:prstGeom>
+          <a:extLst>
+            <a:ext uri="{C572A759-6A51-4108-AA02-DFA0A04FC94B}">
+              <ma14:wrappingTextBoxFlag xmlns:ma14="http://schemas.microsoft.com/office/mac/drawingml/2011/main" val="0"/>
+            </a:ext>
+          </a:extLst>
+        </p:spPr>
+        <p:txBody>
+          <a:bodyPr/>
+          <a:lstStyle>
+            <a:lvl1pPr>
+              <a:defRPr sz="1000">
                 <a:solidFill>
                   <a:srgbClr val="AFAFAF"/>
                 </a:solidFill>
-              </a:rPr>
-              <a:t>2.1  </a:t>
-            </a:r>
-            <a:r>
-              <a:t>O-D 표의 구조</a:t>
-            </a:r>
-          </a:p>
-          <a:p>
-            <a:pPr>
-              <a:spcAft>
-                <a:spcPts val="1000"/>
-              </a:spcAft>
-            </a:pPr>
-            <a:r>
-              <a:rPr>
-                <a:solidFill>
-                  <a:srgbClr val="AFAFAF"/>
-                </a:solidFill>
-              </a:rPr>
-              <a:t>2.2  </a:t>
-            </a:r>
-            <a:r>
-              <a:t>시간대 패턴</a:t>
-            </a:r>
-          </a:p>
-          <a:p>
-            <a:pPr>
-              <a:spcAft>
-                <a:spcPts val="1000"/>
-              </a:spcAft>
-            </a:pPr>
-            <a:r>
-              <a:rPr>
-                <a:solidFill>
-                  <a:srgbClr val="AFAFAF"/>
-                </a:solidFill>
-              </a:rPr>
-              <a:t>2.3  </a:t>
-            </a:r>
-            <a:r>
-              <a:t>공간 패턴</a:t>
-            </a:r>
+                <a:latin typeface="Pretendard Medium"/>
+                <a:ea typeface="Pretendard Medium"/>
+                <a:cs typeface="Pretendard Medium"/>
+              </a:defRPr>
+            </a:lvl1pPr>
+          </a:lstStyle>
+          <a:p>
+            <a:pPr algn="r"/>
+            <a:fld id="{F7021451-1387-4CA6-816F-3879F97B5CBC}" type="slidenum">
+              <a:rPr b="0" lang="en-US"/>
+              <a:t>1008</a:t>
+            </a:fld>
+            <a:endParaRPr lang="en-US"/>
           </a:p>
         </p:txBody>
       </p:sp>
@@ -7939,6 +8465,136 @@
       <p:grpSpPr/>
       <p:sp>
         <p:nvSpPr>
+          <p:cNvPr id="2" name="Text Placeholder 1"/>
+          <p:cNvSpPr>
+            <a:spLocks noGrp="1"/>
+          </p:cNvSpPr>
+          <p:nvPr>
+            <p:ph type="body" idx="100"/>
+          </p:nvPr>
+        </p:nvSpPr>
+        <p:spPr/>
+        <p:txBody>
+          <a:bodyPr/>
+          <a:lstStyle/>
+          <a:p>
+            <a:r>
+              <a:t>02</a:t>
+            </a:r>
+          </a:p>
+        </p:txBody>
+      </p:sp>
+      <p:sp>
+        <p:nvSpPr>
+          <p:cNvPr id="3" name="Title 2"/>
+          <p:cNvSpPr>
+            <a:spLocks noGrp="1"/>
+          </p:cNvSpPr>
+          <p:nvPr>
+            <p:ph type="title" idx="101"/>
+          </p:nvPr>
+        </p:nvSpPr>
+        <p:spPr/>
+        <p:txBody>
+          <a:bodyPr/>
+          <a:lstStyle/>
+          <a:p>
+            <a:r>
+              <a:t>교재 8.1–8.3 O-D 데이터와 패턴</a:t>
+            </a:r>
+          </a:p>
+        </p:txBody>
+      </p:sp>
+      <p:sp>
+        <p:nvSpPr>
+          <p:cNvPr id="4" name="Text Placeholder 3"/>
+          <p:cNvSpPr>
+            <a:spLocks noGrp="1"/>
+          </p:cNvSpPr>
+          <p:nvPr>
+            <p:ph type="body" idx="102"/>
+          </p:nvPr>
+        </p:nvSpPr>
+        <p:spPr/>
+        <p:txBody>
+          <a:bodyPr/>
+          <a:lstStyle/>
+          <a:p>
+            <a:pPr>
+              <a:spcAft>
+                <a:spcPts val="1000"/>
+              </a:spcAft>
+            </a:pPr>
+            <a:r>
+              <a:rPr>
+                <a:solidFill>
+                  <a:srgbClr val="AFAFAF"/>
+                </a:solidFill>
+              </a:rPr>
+              <a:t>2.1  </a:t>
+            </a:r>
+            <a:r>
+              <a:t>O-D 표의 구조</a:t>
+            </a:r>
+          </a:p>
+          <a:p>
+            <a:pPr>
+              <a:spcAft>
+                <a:spcPts val="1000"/>
+              </a:spcAft>
+            </a:pPr>
+            <a:r>
+              <a:rPr>
+                <a:solidFill>
+                  <a:srgbClr val="AFAFAF"/>
+                </a:solidFill>
+              </a:rPr>
+              <a:t>2.2  </a:t>
+            </a:r>
+            <a:r>
+              <a:t>시간대 패턴</a:t>
+            </a:r>
+          </a:p>
+          <a:p>
+            <a:pPr>
+              <a:spcAft>
+                <a:spcPts val="1000"/>
+              </a:spcAft>
+            </a:pPr>
+            <a:r>
+              <a:rPr>
+                <a:solidFill>
+                  <a:srgbClr val="AFAFAF"/>
+                </a:solidFill>
+              </a:rPr>
+              <a:t>2.3  </a:t>
+            </a:r>
+            <a:r>
+              <a:t>공간 패턴</a:t>
+            </a:r>
+          </a:p>
+        </p:txBody>
+      </p:sp>
+    </p:spTree>
+  </p:cSld>
+  <p:clrMapOvr>
+    <a:masterClrMapping/>
+  </p:clrMapOvr>
+</p:sld>
+</file>
+
+<file path=ppt/slides/slide8.xml><?xml version="1.0" encoding="utf-8"?>
+<p:sld xmlns:a="http://schemas.openxmlformats.org/drawingml/2006/main" xmlns:p="http://schemas.openxmlformats.org/presentationml/2006/main" xmlns:r="http://schemas.openxmlformats.org/officeDocument/2006/relationships">
+  <p:cSld>
+    <p:spTree>
+      <p:nvGrpSpPr>
+        <p:cNvPr id="1" name=""/>
+        <p:cNvGrpSpPr/>
+        <p:nvPr/>
+      </p:nvGrpSpPr>
+      <p:grpSpPr/>
+      <p:sp>
+        <p:nvSpPr>
           <p:cNvPr id="2" name="Title 1"/>
           <p:cNvSpPr>
             <a:spLocks noGrp="1"/>
@@ -8029,7 +8685,7 @@
           <a:lstStyle/>
           <a:p>
             <a:r>
-              <a:t>표 1. 수도권 생활이동 O-D 데이터의 컬럼</a:t>
+              <a:t>표 2. 수도권 생활이동 O-D 데이터의 컬럼</a:t>
             </a:r>
           </a:p>
         </p:txBody>
@@ -8482,7 +9138,7 @@
 </p:sld>
 </file>
 
-<file path=ppt/slides/slide8.xml><?xml version="1.0" encoding="utf-8"?>
+<file path=ppt/slides/slide9.xml><?xml version="1.0" encoding="utf-8"?>
 <p:sld xmlns:a="http://schemas.openxmlformats.org/drawingml/2006/main" xmlns:p="http://schemas.openxmlformats.org/presentationml/2006/main" xmlns:r="http://schemas.openxmlformats.org/officeDocument/2006/relationships">
   <p:cSld>
     <p:spTree>
@@ -8661,166 +9317,6 @@
           </a:prstGeom>
         </p:spPr>
       </p:pic>
-    </p:spTree>
-  </p:cSld>
-  <p:clrMapOvr>
-    <a:masterClrMapping/>
-  </p:clrMapOvr>
-</p:sld>
-</file>
-
-<file path=ppt/slides/slide9.xml><?xml version="1.0" encoding="utf-8"?>
-<p:sld xmlns:a="http://schemas.openxmlformats.org/drawingml/2006/main" xmlns:p="http://schemas.openxmlformats.org/presentationml/2006/main" xmlns:r="http://schemas.openxmlformats.org/officeDocument/2006/relationships">
-  <p:cSld>
-    <p:spTree>
-      <p:nvGrpSpPr>
-        <p:cNvPr id="1" name=""/>
-        <p:cNvGrpSpPr/>
-        <p:nvPr/>
-      </p:nvGrpSpPr>
-      <p:grpSpPr/>
-      <p:sp>
-        <p:nvSpPr>
-          <p:cNvPr id="2" name="Title 1"/>
-          <p:cNvSpPr>
-            <a:spLocks noGrp="1"/>
-          </p:cNvSpPr>
-          <p:nvPr>
-            <p:ph type="title" idx="100"/>
-          </p:nvPr>
-        </p:nvSpPr>
-        <p:spPr/>
-        <p:txBody>
-          <a:bodyPr/>
-          <a:lstStyle/>
-          <a:p>
-            <a:r>
-              <a:t>2.3 공간 패턴</a:t>
-            </a:r>
-          </a:p>
-        </p:txBody>
-      </p:sp>
-      <p:sp>
-        <p:nvSpPr>
-          <p:cNvPr id="3" name="Text Placeholder 2"/>
-          <p:cNvSpPr>
-            <a:spLocks noGrp="1"/>
-          </p:cNvSpPr>
-          <p:nvPr>
-            <p:ph type="body" idx="101"/>
-          </p:nvPr>
-        </p:nvSpPr>
-        <p:spPr/>
-        <p:txBody>
-          <a:bodyPr/>
-          <a:lstStyle/>
-          <a:p>
-            <a:r>
-              <a:t>2. 교재 8.1–8.3 O-D 데이터와 패턴</a:t>
-            </a:r>
-          </a:p>
-        </p:txBody>
-      </p:sp>
-      <p:sp>
-        <p:nvSpPr>
-          <p:cNvPr id="4" name="Text Placeholder 3"/>
-          <p:cNvSpPr>
-            <a:spLocks noGrp="1"/>
-          </p:cNvSpPr>
-          <p:nvPr>
-            <p:ph type="body" idx="102"/>
-          </p:nvPr>
-        </p:nvSpPr>
-        <p:spPr/>
-        <p:txBody>
-          <a:bodyPr/>
-          <a:lstStyle/>
-          <a:p>
-            <a:pPr/>
-            <a:r>
-              <a:t>하남 출발 통행의 54%가 하남 안에서 종료</a:t>
-            </a:r>
-          </a:p>
-          <a:p>
-            <a:pPr/>
-            <a:r>
-              <a:t>나머지 절반의 목적지: 서울 동남권(강동·송파·강남)과 인접 시군</a:t>
-            </a:r>
-          </a:p>
-          <a:p>
-            <a:pPr/>
-            <a:r>
-              <a:t>경계 설정의 영향</a:t>
-            </a:r>
-          </a:p>
-          <a:p>
-            <a:pPr lvl="1"/>
-            <a:r>
-              <a:t>하남 경계 안만 다루면 통행의 절반 누락</a:t>
-            </a:r>
-          </a:p>
-          <a:p>
-            <a:pPr lvl="1"/>
-            <a:r>
-              <a:t>수도권 전체를 다루면 데이터와 계산량이 크게 증가</a:t>
-            </a:r>
-          </a:p>
-          <a:p>
-            <a:pPr/>
-            <a:r>
-              <a:t>결정 기준: 답하려는 질문</a:t>
-            </a:r>
-          </a:p>
-        </p:txBody>
-      </p:sp>
-      <p:sp>
-        <p:nvSpPr>
-          <p:cNvPr id="25" name="Slide Number Placeholder 0"/>
-          <p:cNvSpPr>
-            <a:spLocks noGrp="1"/>
-          </p:cNvSpPr>
-          <p:nvPr>
-            <p:ph type="sldNum" sz="quarter" idx="4294967295"/>
-          </p:nvPr>
-        </p:nvSpPr>
-        <p:spPr>
-          <a:xfrm>
-            <a:off x="10591495" y="6355080"/>
-            <a:ext cx="914400" cy="274320"/>
-          </a:xfrm>
-          <a:prstGeom prst="rect">
-            <a:avLst/>
-          </a:prstGeom>
-          <a:extLst>
-            <a:ext uri="{C572A759-6A51-4108-AA02-DFA0A04FC94B}">
-              <ma14:wrappingTextBoxFlag xmlns:ma14="http://schemas.microsoft.com/office/mac/drawingml/2011/main" val="0"/>
-            </a:ext>
-          </a:extLst>
-        </p:spPr>
-        <p:txBody>
-          <a:bodyPr/>
-          <a:lstStyle>
-            <a:lvl1pPr>
-              <a:defRPr sz="1000">
-                <a:solidFill>
-                  <a:srgbClr val="AFAFAF"/>
-                </a:solidFill>
-                <a:latin typeface="Pretendard Medium"/>
-                <a:ea typeface="Pretendard Medium"/>
-                <a:cs typeface="Pretendard Medium"/>
-              </a:defRPr>
-            </a:lvl1pPr>
-          </a:lstStyle>
-          <a:p>
-            <a:pPr algn="r"/>
-            <a:fld id="{F7021451-1387-4CA6-816F-3879F97B5CBC}" type="slidenum">
-              <a:rPr b="0" lang="en-US"/>
-              <a:t>1004</a:t>
-            </a:fld>
-            <a:endParaRPr lang="en-US"/>
-          </a:p>
-        </p:txBody>
-      </p:sp>
     </p:spTree>
   </p:cSld>
   <p:clrMapOvr>
